--- a/assets/pptx/catalog-68.pptx
+++ b/assets/pptx/catalog-68.pptx
@@ -3321,7 +3321,7 @@
                 <a:ea typeface="Ebrima"/>
                 <a:cs typeface="Ebrima"/>
               </a:rPr>
-              <a:t>ለእኔ ነው ለእኔ ነው (2x) ኦ ለእኔ ነው (2x) ኢየሱስ የሞተው</a:t>
+              <a:t>ለእኔ ነው ለእኔ ነው 2x ኦ ለእኔ ነው 2x ኢየሱስ የሞተው</a:t>
             </a:r>
           </a:p>
         </p:txBody>
@@ -3589,7 +3589,7 @@
                 <a:ea typeface="Ebrima"/>
                 <a:cs typeface="Ebrima"/>
               </a:rPr>
-              <a:t>ዘምራለው ዘምራለው ለመድኃኒቴ (4x)</a:t>
+              <a:t>ዘምራለው ዘምራለው ለመድኃኒቴ 4x</a:t>
             </a:r>
           </a:p>
         </p:txBody>
@@ -3924,7 +3924,7 @@
                 <a:ea typeface="Ebrima"/>
                 <a:cs typeface="Ebrima"/>
               </a:rPr>
-              <a:t>ዘምራለው ዘምራለው ለመድኃኒቴ (2x)</a:t>
+              <a:t>ዘምራለው ዘምራለው ለመድኃኒቴ 2x</a:t>
             </a:r>
           </a:p>
         </p:txBody>
